--- a/practice-en/lab-1-document-format.pptx
+++ b/practice-en/lab-1-document-format.pptx
@@ -511,22 +511,22 @@
           <a:lstStyle/>
           <a:p>
             <a:r>
-              <a:t>MỞ ĐẦU BUỔI THỰC HÀNH (3 phút)</a:t>
-            </a:r>
-          </a:p>
-          <a:p>
-            <a:r>
-              <a:t>• Kiểm tra: bao nhiêu bạn mang laptop, bao nhiêu bạn đã cài Word.</a:t>
-            </a:r>
-          </a:p>
-          <a:p>
-            <a:r>
-              <a:t>• Ghép bạn không có máy ngồi cùng bạn có máy.</a:t>
-            </a:r>
-          </a:p>
-          <a:p>
-            <a:r>
-              <a:t>• Nói rõ sản phẩm cuối buổi: 1 file Word nộp trước khi ra về.</a:t>
+              <a:t>OPENING THE LAB (3 minutes)</a:t>
+            </a:r>
+          </a:p>
+          <a:p>
+            <a:r>
+              <a:t>• Check: how many brought a laptop, how many have Word installed.</a:t>
+            </a:r>
+          </a:p>
+          <a:p>
+            <a:r>
+              <a:t>• Pair anyone without a machine with someone who has one.</a:t>
+            </a:r>
+          </a:p>
+          <a:p>
+            <a:r>
+              <a:t>• Say what they leave with: one Word file, submitted before they go.</a:t>
             </a:r>
           </a:p>
         </p:txBody>
@@ -612,7 +612,7 @@
           <a:lstStyle/>
           <a:p>
             <a:r>
-              <a:t>TIÊU CHÍ CHẤM (2 phút) — đọc rõ 3 tiêu chí và tỷ trọng để sinh viên biết trọng tâm.</a:t>
+              <a:t>MARKING CRITERIA (2 minutes) — read the three criteria and their weights so students know where to put the effort.</a:t>
             </a:r>
           </a:p>
         </p:txBody>
@@ -698,7 +698,7 @@
           <a:lstStyle/>
           <a:p>
             <a:r>
-              <a:t>KẾT BUỔI (1 phút) — nhắc buổi sau: Bài 2, soạn 5 văn bản hành chính; xem trước video hướng dẫn.</a:t>
+              <a:t>CLOSING (1 minute) — next time: Lab 2, drafting five administrative documents; watch the guide video beforehand.</a:t>
             </a:r>
           </a:p>
         </p:txBody>
@@ -784,7 +784,7 @@
           <a:lstStyle/>
           <a:p>
             <a:r>
-              <a:t>MỤC TIÊU (2 phút) — đọc 3 mục tiêu; nhấn: buổi này CHẤM KỸ THỂ THỨC, nội dung chỉ cần vài dòng.</a:t>
+              <a:t>OBJECTIVES (2 minutes) — read the three; press it: today the FORMAT is marked closely, the content only needs a few lines.</a:t>
             </a:r>
           </a:p>
         </p:txBody>
@@ -870,7 +870,7 @@
           <a:lstStyle/>
           <a:p>
             <a:r>
-              <a:t>NỘI DUNG (1 phút) — 2 phần: nhận diện thành phần, rồi thực hành trình bày.</a:t>
+              <a:t>CONTENTS (1 minute) — two parts: identifying the components, then setting one out in practice.</a:t>
             </a:r>
           </a:p>
         </p:txBody>
@@ -956,17 +956,17 @@
           <a:lstStyle/>
           <a:p>
             <a:r>
-              <a:t>QUY TRÌNH 5 BƯỚC (2 phút)</a:t>
-            </a:r>
-          </a:p>
-          <a:p>
-            <a:r>
-              <a:t>• Giải thích cách buổi học vận hành; nhấn bước CHẤM CHÉO — bạn ngồi cạnh soát bài cho nhau.</a:t>
-            </a:r>
-          </a:p>
-          <a:p>
-            <a:r>
-              <a:t>• Nói trước: cô đi từng bàn, ai vướng giơ tay.</a:t>
+              <a:t>THE FIVE STEPS (2 minutes)</a:t>
+            </a:r>
+          </a:p>
+          <a:p>
+            <a:r>
+              <a:t>• Explain how the session runs; press the PEER-MARKING step — the person next to you checks your work.</a:t>
+            </a:r>
+          </a:p>
+          <a:p>
+            <a:r>
+              <a:t>• Say it up front: you will walk the room, hands up if stuck.</a:t>
             </a:r>
           </a:p>
         </p:txBody>
@@ -1052,37 +1052,37 @@
           <a:lstStyle/>
           <a:p>
             <a:r>
-              <a:t>BƯỚC 1 — LÀM MẪU TRÊN MÁY CHIẾU (8 phút)</a:t>
-            </a:r>
-          </a:p>
-          <a:p>
-            <a:r>
-              <a:t>• Cô mở Word và thao tác THẬT, chậm rãi, sinh viên làm theo trên máy mình.</a:t>
-            </a:r>
-          </a:p>
-          <a:p>
-            <a:r>
-              <a:t>• Layout → Size → A4. Nhấn: KHÔNG dùng Letter (mặc định của nhiều máy).</a:t>
-            </a:r>
-          </a:p>
-          <a:p>
-            <a:r>
-              <a:t>• Layout → Margins → Custom. Gõ từng con số, nói to trong lúc gõ.</a:t>
-            </a:r>
-          </a:p>
-          <a:p>
-            <a:r>
-              <a:t>• Chọn phông Times New Roman cỡ 13, kiểm tra gõ tiếng Việt có dấu.</a:t>
-            </a:r>
-          </a:p>
-          <a:p>
-            <a:r>
-              <a:t>• Insert → Page Number → Top of Page → Center, rồi tích Different First Page.</a:t>
-            </a:r>
-          </a:p>
-          <a:p>
-            <a:r>
-              <a:t>• Dừng lại hỏi: "Bạn nào chưa làm được, giơ tay."''</a:t>
+              <a:t>STEP 1 — DEMONSTRATION ON THE PROJECTOR (8 minutes)</a:t>
+            </a:r>
+          </a:p>
+          <a:p>
+            <a:r>
+              <a:t>• Open Word and do it FOR REAL, slowly, with students following on their own machines.</a:t>
+            </a:r>
+          </a:p>
+          <a:p>
+            <a:r>
+              <a:t>• Layout → Size → A4. Press: NOT Letter (the default on many machines).</a:t>
+            </a:r>
+          </a:p>
+          <a:p>
+            <a:r>
+              <a:t>• Layout → Margins → Custom. Type each figure, saying it aloud as you type.</a:t>
+            </a:r>
+          </a:p>
+          <a:p>
+            <a:r>
+              <a:t>• Set Times New Roman 13 pt, and check that Vietnamese diacritics type correctly.</a:t>
+            </a:r>
+          </a:p>
+          <a:p>
+            <a:r>
+              <a:t>• Insert → Page Number → Top of Page → Center, then tick Different First Page.</a:t>
+            </a:r>
+          </a:p>
+          <a:p>
+            <a:r>
+              <a:t>• Stop and ask: "Hands up anyone who hasn't got there."''</a:t>
             </a:r>
           </a:p>
         </p:txBody>
@@ -1168,27 +1168,27 @@
           <a:lstStyle/>
           <a:p>
             <a:r>
-              <a:t>BƯỚC 2 — PHẦN ĐẦU (10 phút)</a:t>
-            </a:r>
-          </a:p>
-          <a:p>
-            <a:r>
-              <a:t>• Làm mẫu Quốc hiệu – Tiêu ngữ, chỉ rõ cách canh phải và kẻ đường ngang bên dưới.</a:t>
-            </a:r>
-          </a:p>
-          <a:p>
-            <a:r>
-              <a:t>• Lỗi thường gặp: gõ Tiêu ngữ không có gạch nối, hoặc dùng dấu gạch ngang sai.</a:t>
-            </a:r>
-          </a:p>
-          <a:p>
-            <a:r>
-              <a:t>• Số ký hiệu: viết ví dụ cho 3 loại lên bảng — QĐ, TTr, và công văn (không có tên loại).</a:t>
-            </a:r>
-          </a:p>
-          <a:p>
-            <a:r>
-              <a:t>• Ngày tháng: nhấn quy tắc THÊM SỐ 0 với ngày/tháng nhỏ hơn 10.</a:t>
+              <a:t>STEP 2 — THE HEAD OF THE DOCUMENT (10 minutes)</a:t>
+            </a:r>
+          </a:p>
+          <a:p>
+            <a:r>
+              <a:t>• Demonstrate the national heading and motto, showing the right alignment and the rule beneath them.</a:t>
+            </a:r>
+          </a:p>
+          <a:p>
+            <a:r>
+              <a:t>• Common mistakes: typing the motto without hyphens, or using the wrong dash.</a:t>
+            </a:r>
+          </a:p>
+          <a:p>
+            <a:r>
+              <a:t>• Reference numbers: write examples of three types on the board — QĐ (decision), TTr (submission), and an official letter (no type name).</a:t>
+            </a:r>
+          </a:p>
+          <a:p>
+            <a:r>
+              <a:t>• The date: press the rule of ADDING A LEADING ZERO for days and months below 10.</a:t>
             </a:r>
           </a:p>
         </p:txBody>
@@ -1274,22 +1274,22 @@
           <a:lstStyle/>
           <a:p>
             <a:r>
-              <a:t>BƯỚC 3 — PHẦN GIỮA VÀ CUỐI (8 phút)</a:t>
-            </a:r>
-          </a:p>
-          <a:p>
-            <a:r>
-              <a:t>• Trích yếu: ngắn, phản ánh đúng nội dung. Cho lớp thử đặt trích yếu cho 1 tình huống.</a:t>
-            </a:r>
-          </a:p>
-          <a:p>
-            <a:r>
-              <a:t>• Phần ký: nhấn CHỪA 3–4 DÒNG TRỐNG cho chữ ký — sinh viên hay quên, ký chèn lên chữ.</a:t>
-            </a:r>
-          </a:p>
-          <a:p>
-            <a:r>
-              <a:t>• Nơi nhận: dòng cuối LUÔN là "- Lưu: VT, …".</a:t>
+              <a:t>STEP 3 — THE BODY AND THE FOOT (8 minutes)</a:t>
+            </a:r>
+          </a:p>
+          <a:p>
+            <a:r>
+              <a:t>• The subject line: short, and true to the content. Have the class try one for a given situation.</a:t>
+            </a:r>
+          </a:p>
+          <a:p>
+            <a:r>
+              <a:t>• The signature block: press LEAVE 3–4 BLANK LINES for the signature — students forget, and then the signature lands on the text.</a:t>
+            </a:r>
+          </a:p>
+          <a:p>
+            <a:r>
+              <a:t>• The distribution list: the last line is ALWAYS "- Filed: Registry, …".</a:t>
             </a:r>
           </a:p>
         </p:txBody>
@@ -1375,22 +1375,22 @@
           <a:lstStyle/>
           <a:p>
             <a:r>
-              <a:t>BẢNG KIỂM (5 phút)</a:t>
-            </a:r>
-          </a:p>
-          <a:p>
-            <a:r>
-              <a:t>• Cho sinh viên tự soát bài mình theo 8 điểm, tích vào vở.</a:t>
-            </a:r>
-          </a:p>
-          <a:p>
-            <a:r>
-              <a:t>• Sau đó ĐỔI BÀI với bạn bên cạnh, soát cho nhau, ghi ra 2 lỗi tìm được.</a:t>
-            </a:r>
-          </a:p>
-          <a:p>
-            <a:r>
-              <a:t>• Nói rõ: cô chấm theo đúng 8 điểm này.</a:t>
+              <a:t>THE CHECKLIST (5 minutes)</a:t>
+            </a:r>
+          </a:p>
+          <a:p>
+            <a:r>
+              <a:t>• Have students check their own work against the eight points and tick them off in their notebooks.</a:t>
+            </a:r>
+          </a:p>
+          <a:p>
+            <a:r>
+              <a:t>• Then SWAP with the person beside them, check each other's, and write down two faults found.</a:t>
+            </a:r>
+          </a:p>
+          <a:p>
+            <a:r>
+              <a:t>• Say it plainly: you mark against exactly these eight points.</a:t>
             </a:r>
           </a:p>
         </p:txBody>

--- a/practice-en/lab-1-document-format.pptx
+++ b/practice-en/lab-1-document-format.pptx
@@ -1476,10 +1476,28 @@
           <a:lstStyle/>
           <a:p>
             <a:r>
-              <a:rPr lang="en-US" dirty="0"/>
-              <a:t/>
-            </a:r>
-            <a:endParaRPr lang="en-US" dirty="0"/>
+              <a:t>THE EXERCISE (20 minutes)</a:t>
+            </a:r>
+          </a:p>
+          <a:p>
+            <a:r>
+              <a:t>• Hand out the situations; remind them the body is only 3–5 lines.</a:t>
+            </a:r>
+          </a:p>
+          <a:p>
+            <a:r>
+              <a:t>• Walk the room helping, and note the common mistakes.</a:t>
+            </a:r>
+          </a:p>
+          <a:p>
+            <a:r>
+              <a:t>• Five minutes left: remind the class to save the file as "FullName_Class_Lab1.docx" and submit.</a:t>
+            </a:r>
+          </a:p>
+          <a:p>
+            <a:r>
+              <a:t>• Close the session: name the three most common mistakes you just watched them make.</a:t>
+            </a:r>
           </a:p>
         </p:txBody>
       </p:sp>
